--- a/Lessons/Lesson B2-10 - Searching Algorithms.pptx
+++ b/Lessons/Lesson B2-10 - Searching Algorithms.pptx
@@ -143,7 +143,7 @@
   <pc:docChgLst>
     <pc:chgData name="Michael Hill" userId="41dba03d-e58d-4389-9894-554c10310ba4" providerId="ADAL" clId="{EF23FE1D-A042-481E-AFD7-2A9FB0847F54}"/>
     <pc:docChg chg="undo custSel addSld delSld modSld sldOrd">
-      <pc:chgData name="Michael Hill" userId="41dba03d-e58d-4389-9894-554c10310ba4" providerId="ADAL" clId="{EF23FE1D-A042-481E-AFD7-2A9FB0847F54}" dt="2025-09-10T20:48:40.159" v="3370" actId="20577"/>
+      <pc:chgData name="Michael Hill" userId="41dba03d-e58d-4389-9894-554c10310ba4" providerId="ADAL" clId="{EF23FE1D-A042-481E-AFD7-2A9FB0847F54}" dt="2025-09-18T18:42:05.125" v="3387" actId="20577"/>
       <pc:docMkLst>
         <pc:docMk/>
       </pc:docMkLst>
@@ -201,7 +201,7 @@
         </pc:spChg>
       </pc:sldChg>
       <pc:sldChg chg="modSp mod">
-        <pc:chgData name="Michael Hill" userId="41dba03d-e58d-4389-9894-554c10310ba4" providerId="ADAL" clId="{EF23FE1D-A042-481E-AFD7-2A9FB0847F54}" dt="2025-09-10T20:48:40.159" v="3370" actId="20577"/>
+        <pc:chgData name="Michael Hill" userId="41dba03d-e58d-4389-9894-554c10310ba4" providerId="ADAL" clId="{EF23FE1D-A042-481E-AFD7-2A9FB0847F54}" dt="2025-09-18T17:53:17.909" v="3386" actId="20577"/>
         <pc:sldMkLst>
           <pc:docMk/>
           <pc:sldMk cId="510623671" sldId="276"/>
@@ -215,7 +215,7 @@
           </ac:spMkLst>
         </pc:spChg>
         <pc:spChg chg="mod">
-          <ac:chgData name="Michael Hill" userId="41dba03d-e58d-4389-9894-554c10310ba4" providerId="ADAL" clId="{EF23FE1D-A042-481E-AFD7-2A9FB0847F54}" dt="2025-09-10T20:48:40.159" v="3370" actId="20577"/>
+          <ac:chgData name="Michael Hill" userId="41dba03d-e58d-4389-9894-554c10310ba4" providerId="ADAL" clId="{EF23FE1D-A042-481E-AFD7-2A9FB0847F54}" dt="2025-09-18T17:53:17.909" v="3386" actId="20577"/>
           <ac:spMkLst>
             <pc:docMk/>
             <pc:sldMk cId="510623671" sldId="276"/>
@@ -260,22 +260,6 @@
             <ac:spMk id="8" creationId="{DB975E50-7FB3-B06D-773B-3642E1C38505}"/>
           </ac:spMkLst>
         </pc:spChg>
-        <pc:picChg chg="del">
-          <ac:chgData name="Michael Hill" userId="41dba03d-e58d-4389-9894-554c10310ba4" providerId="ADAL" clId="{EF23FE1D-A042-481E-AFD7-2A9FB0847F54}" dt="2025-09-10T20:01:10.584" v="198" actId="478"/>
-          <ac:picMkLst>
-            <pc:docMk/>
-            <pc:sldMk cId="207520820" sldId="333"/>
-            <ac:picMk id="6" creationId="{18C7D0D2-72D2-882E-794B-CC3FAEB68519}"/>
-          </ac:picMkLst>
-        </pc:picChg>
-        <pc:picChg chg="del">
-          <ac:chgData name="Michael Hill" userId="41dba03d-e58d-4389-9894-554c10310ba4" providerId="ADAL" clId="{EF23FE1D-A042-481E-AFD7-2A9FB0847F54}" dt="2025-09-10T20:01:09.991" v="197" actId="478"/>
-          <ac:picMkLst>
-            <pc:docMk/>
-            <pc:sldMk cId="207520820" sldId="333"/>
-            <ac:picMk id="11" creationId="{D159A1A4-BDDF-57FB-9D02-E4ACDE7B4818}"/>
-          </ac:picMkLst>
-        </pc:picChg>
       </pc:sldChg>
       <pc:sldChg chg="modSp mod">
         <pc:chgData name="Michael Hill" userId="41dba03d-e58d-4389-9894-554c10310ba4" providerId="ADAL" clId="{EF23FE1D-A042-481E-AFD7-2A9FB0847F54}" dt="2025-09-10T20:46:55.866" v="3245" actId="313"/>
@@ -497,22 +481,6 @@
             <ac:spMk id="8" creationId="{3867F8E8-B018-1094-7318-A39BDFAE0548}"/>
           </ac:spMkLst>
         </pc:spChg>
-        <pc:picChg chg="add del mod">
-          <ac:chgData name="Michael Hill" userId="41dba03d-e58d-4389-9894-554c10310ba4" providerId="ADAL" clId="{EF23FE1D-A042-481E-AFD7-2A9FB0847F54}" dt="2025-09-10T20:17:59.736" v="1099" actId="21"/>
-          <ac:picMkLst>
-            <pc:docMk/>
-            <pc:sldMk cId="591541927" sldId="390"/>
-            <ac:picMk id="3" creationId="{29BF1ABF-F283-A120-77A4-78D8A7C647D9}"/>
-          </ac:picMkLst>
-        </pc:picChg>
-        <pc:picChg chg="add mod">
-          <ac:chgData name="Michael Hill" userId="41dba03d-e58d-4389-9894-554c10310ba4" providerId="ADAL" clId="{EF23FE1D-A042-481E-AFD7-2A9FB0847F54}" dt="2025-09-10T20:18:46.241" v="1108"/>
-          <ac:picMkLst>
-            <pc:docMk/>
-            <pc:sldMk cId="591541927" sldId="390"/>
-            <ac:picMk id="10" creationId="{4B036E89-D6F4-5D53-C565-5DD7F558D32B}"/>
-          </ac:picMkLst>
-        </pc:picChg>
       </pc:sldChg>
       <pc:sldChg chg="del">
         <pc:chgData name="Michael Hill" userId="41dba03d-e58d-4389-9894-554c10310ba4" providerId="ADAL" clId="{EF23FE1D-A042-481E-AFD7-2A9FB0847F54}" dt="2025-09-10T20:05:20.063" v="551" actId="47"/>
@@ -574,13 +542,13 @@
         </pc:sldMkLst>
       </pc:sldChg>
       <pc:sldChg chg="addSp modSp add mod">
-        <pc:chgData name="Michael Hill" userId="41dba03d-e58d-4389-9894-554c10310ba4" providerId="ADAL" clId="{EF23FE1D-A042-481E-AFD7-2A9FB0847F54}" dt="2025-09-10T20:31:18.059" v="2532" actId="1076"/>
+        <pc:chgData name="Michael Hill" userId="41dba03d-e58d-4389-9894-554c10310ba4" providerId="ADAL" clId="{EF23FE1D-A042-481E-AFD7-2A9FB0847F54}" dt="2025-09-18T18:42:05.125" v="3387" actId="20577"/>
         <pc:sldMkLst>
           <pc:docMk/>
           <pc:sldMk cId="2126002080" sldId="393"/>
         </pc:sldMkLst>
         <pc:spChg chg="mod">
-          <ac:chgData name="Michael Hill" userId="41dba03d-e58d-4389-9894-554c10310ba4" providerId="ADAL" clId="{EF23FE1D-A042-481E-AFD7-2A9FB0847F54}" dt="2025-09-10T20:30:00.119" v="2391" actId="5793"/>
+          <ac:chgData name="Michael Hill" userId="41dba03d-e58d-4389-9894-554c10310ba4" providerId="ADAL" clId="{EF23FE1D-A042-481E-AFD7-2A9FB0847F54}" dt="2025-09-18T18:42:05.125" v="3387" actId="20577"/>
           <ac:spMkLst>
             <pc:docMk/>
             <pc:sldMk cId="2126002080" sldId="393"/>
@@ -641,30 +609,6 @@
             <ac:spMk id="8" creationId="{97C87998-EA9B-64DA-3676-F35AAA15B558}"/>
           </ac:spMkLst>
         </pc:spChg>
-        <pc:spChg chg="del">
-          <ac:chgData name="Michael Hill" userId="41dba03d-e58d-4389-9894-554c10310ba4" providerId="ADAL" clId="{EF23FE1D-A042-481E-AFD7-2A9FB0847F54}" dt="2025-09-10T20:45:28.833" v="3078" actId="478"/>
-          <ac:spMkLst>
-            <pc:docMk/>
-            <pc:sldMk cId="2433276207" sldId="395"/>
-            <ac:spMk id="16" creationId="{F3CE7C2D-BE40-0CA8-2D0E-73903A63E40A}"/>
-          </ac:spMkLst>
-        </pc:spChg>
-        <pc:picChg chg="del">
-          <ac:chgData name="Michael Hill" userId="41dba03d-e58d-4389-9894-554c10310ba4" providerId="ADAL" clId="{EF23FE1D-A042-481E-AFD7-2A9FB0847F54}" dt="2025-09-10T20:45:26.587" v="3077" actId="478"/>
-          <ac:picMkLst>
-            <pc:docMk/>
-            <pc:sldMk cId="2433276207" sldId="395"/>
-            <ac:picMk id="13" creationId="{5692E29B-5BAB-814D-4E74-EA72C4A79041}"/>
-          </ac:picMkLst>
-        </pc:picChg>
-        <pc:picChg chg="del">
-          <ac:chgData name="Michael Hill" userId="41dba03d-e58d-4389-9894-554c10310ba4" providerId="ADAL" clId="{EF23FE1D-A042-481E-AFD7-2A9FB0847F54}" dt="2025-09-10T20:45:23.699" v="3076" actId="478"/>
-          <ac:picMkLst>
-            <pc:docMk/>
-            <pc:sldMk cId="2433276207" sldId="395"/>
-            <ac:picMk id="15" creationId="{BDEA021E-1AC4-56FA-3440-D3F95B66A773}"/>
-          </ac:picMkLst>
-        </pc:picChg>
       </pc:sldChg>
       <pc:sldChg chg="modSp add mod">
         <pc:chgData name="Michael Hill" userId="41dba03d-e58d-4389-9894-554c10310ba4" providerId="ADAL" clId="{EF23FE1D-A042-481E-AFD7-2A9FB0847F54}" dt="2025-09-10T20:47:08.447" v="3260" actId="20577"/>
@@ -776,7 +720,7 @@
           <a:p>
             <a:fld id="{4C0EF95B-9744-42BF-8E95-B5A640A352E6}" type="datetimeFigureOut">
               <a:rPr lang="en-US" smtClean="0"/>
-              <a:t>9/10/2025</a:t>
+              <a:t>9/18/2025</a:t>
             </a:fld>
             <a:endParaRPr lang="en-US"/>
           </a:p>
@@ -1298,7 +1242,7 @@
           <a:p>
             <a:fld id="{52CFA067-BC5A-4095-A3A5-99A1BAFE9208}" type="datetimeFigureOut">
               <a:rPr lang="en-US" smtClean="0"/>
-              <a:t>9/10/2025</a:t>
+              <a:t>9/18/2025</a:t>
             </a:fld>
             <a:endParaRPr lang="en-US"/>
           </a:p>
@@ -1496,7 +1440,7 @@
           <a:p>
             <a:fld id="{52CFA067-BC5A-4095-A3A5-99A1BAFE9208}" type="datetimeFigureOut">
               <a:rPr lang="en-US" smtClean="0"/>
-              <a:t>9/10/2025</a:t>
+              <a:t>9/18/2025</a:t>
             </a:fld>
             <a:endParaRPr lang="en-US"/>
           </a:p>
@@ -1704,7 +1648,7 @@
           <a:p>
             <a:fld id="{52CFA067-BC5A-4095-A3A5-99A1BAFE9208}" type="datetimeFigureOut">
               <a:rPr lang="en-US" smtClean="0"/>
-              <a:t>9/10/2025</a:t>
+              <a:t>9/18/2025</a:t>
             </a:fld>
             <a:endParaRPr lang="en-US"/>
           </a:p>
@@ -1902,7 +1846,7 @@
           <a:p>
             <a:fld id="{52CFA067-BC5A-4095-A3A5-99A1BAFE9208}" type="datetimeFigureOut">
               <a:rPr lang="en-US" smtClean="0"/>
-              <a:t>9/10/2025</a:t>
+              <a:t>9/18/2025</a:t>
             </a:fld>
             <a:endParaRPr lang="en-US"/>
           </a:p>
@@ -2177,7 +2121,7 @@
           <a:p>
             <a:fld id="{52CFA067-BC5A-4095-A3A5-99A1BAFE9208}" type="datetimeFigureOut">
               <a:rPr lang="en-US" smtClean="0"/>
-              <a:t>9/10/2025</a:t>
+              <a:t>9/18/2025</a:t>
             </a:fld>
             <a:endParaRPr lang="en-US"/>
           </a:p>
@@ -2442,7 +2386,7 @@
           <a:p>
             <a:fld id="{52CFA067-BC5A-4095-A3A5-99A1BAFE9208}" type="datetimeFigureOut">
               <a:rPr lang="en-US" smtClean="0"/>
-              <a:t>9/10/2025</a:t>
+              <a:t>9/18/2025</a:t>
             </a:fld>
             <a:endParaRPr lang="en-US"/>
           </a:p>
@@ -2854,7 +2798,7 @@
           <a:p>
             <a:fld id="{52CFA067-BC5A-4095-A3A5-99A1BAFE9208}" type="datetimeFigureOut">
               <a:rPr lang="en-US" smtClean="0"/>
-              <a:t>9/10/2025</a:t>
+              <a:t>9/18/2025</a:t>
             </a:fld>
             <a:endParaRPr lang="en-US"/>
           </a:p>
@@ -2995,7 +2939,7 @@
           <a:p>
             <a:fld id="{52CFA067-BC5A-4095-A3A5-99A1BAFE9208}" type="datetimeFigureOut">
               <a:rPr lang="en-US" smtClean="0"/>
-              <a:t>9/10/2025</a:t>
+              <a:t>9/18/2025</a:t>
             </a:fld>
             <a:endParaRPr lang="en-US"/>
           </a:p>
@@ -3108,7 +3052,7 @@
           <a:p>
             <a:fld id="{52CFA067-BC5A-4095-A3A5-99A1BAFE9208}" type="datetimeFigureOut">
               <a:rPr lang="en-US" smtClean="0"/>
-              <a:t>9/10/2025</a:t>
+              <a:t>9/18/2025</a:t>
             </a:fld>
             <a:endParaRPr lang="en-US"/>
           </a:p>
@@ -3419,7 +3363,7 @@
           <a:p>
             <a:fld id="{52CFA067-BC5A-4095-A3A5-99A1BAFE9208}" type="datetimeFigureOut">
               <a:rPr lang="en-US" smtClean="0"/>
-              <a:t>9/10/2025</a:t>
+              <a:t>9/18/2025</a:t>
             </a:fld>
             <a:endParaRPr lang="en-US"/>
           </a:p>
@@ -3707,7 +3651,7 @@
           <a:p>
             <a:fld id="{52CFA067-BC5A-4095-A3A5-99A1BAFE9208}" type="datetimeFigureOut">
               <a:rPr lang="en-US" smtClean="0"/>
-              <a:t>9/10/2025</a:t>
+              <a:t>9/18/2025</a:t>
             </a:fld>
             <a:endParaRPr lang="en-US"/>
           </a:p>
@@ -3948,7 +3892,7 @@
           <a:p>
             <a:fld id="{52CFA067-BC5A-4095-A3A5-99A1BAFE9208}" type="datetimeFigureOut">
               <a:rPr lang="en-US" smtClean="0"/>
-              <a:t>9/10/2025</a:t>
+              <a:t>9/18/2025</a:t>
             </a:fld>
             <a:endParaRPr lang="en-US"/>
           </a:p>
@@ -5551,7 +5495,25 @@
                 </a:solidFill>
                 <a:latin typeface="Bahnschrift" panose="020B0502040204020203" pitchFamily="34" charset="0"/>
               </a:rPr>
-              <a:t>A variable called mid that stores the result of (lower + upper)/2</a:t>
+              <a:t>A variable called mid that stores the result of (lower + </a:t>
+            </a:r>
+            <a:r>
+              <a:rPr lang="en-US" sz="2800">
+                <a:solidFill>
+                  <a:schemeClr val="bg1"/>
+                </a:solidFill>
+                <a:latin typeface="Bahnschrift" panose="020B0502040204020203" pitchFamily="34" charset="0"/>
+              </a:rPr>
+              <a:t>upper)//</a:t>
+            </a:r>
+            <a:r>
+              <a:rPr lang="en-US" sz="2800" dirty="0">
+                <a:solidFill>
+                  <a:schemeClr val="bg1"/>
+                </a:solidFill>
+                <a:latin typeface="Bahnschrift" panose="020B0502040204020203" pitchFamily="34" charset="0"/>
+              </a:rPr>
+              <a:t>2</a:t>
             </a:r>
           </a:p>
           <a:p>
@@ -10335,16 +10297,7 @@
                 </a:solidFill>
                 <a:latin typeface="Bahnschrift" panose="020B0502040204020203" pitchFamily="34" charset="0"/>
               </a:rPr>
-              <a:t>Now, from memory, try and recreate both the sequential and linear </a:t>
-            </a:r>
-            <a:r>
-              <a:rPr lang="en-US" sz="2800">
-                <a:solidFill>
-                  <a:schemeClr val="bg1"/>
-                </a:solidFill>
-                <a:latin typeface="Bahnschrift" panose="020B0502040204020203" pitchFamily="34" charset="0"/>
-              </a:rPr>
-              <a:t>search algorithms</a:t>
+              <a:t>Now, from memory, try and recreate both the sequential and binary search algorithms</a:t>
             </a:r>
           </a:p>
           <a:p>
